--- a/dist/초3/영어/듣기와말하기/초3_영어_듣기와말하기_03_감사·사과·부탁_학생용.pptx
+++ b/dist/초3/영어/듣기와말하기/초3_영어_듣기와말하기_03_감사·사과·부탁_학생용.pptx
@@ -120,20 +120,20 @@
   <p:extLst>
     <p:ext uri="{521415D9-36F7-43E2-AB2F-B90AF26B5E84}">
       <p14:sectionLst xmlns:p14="http://schemas.microsoft.com/office/powerpoint/2010/main">
-        <p14:section name="도입" id="{9fd94d29-f292-259c-ee6c-f2efe7fa1821}">
+        <p14:section name="도입" id="{2f1c24aa-c786-7d9e-5398-df5675c2a498}">
           <p14:sldIdLst>
             <p14:sldId id="256"/>
             <p14:sldId id="257"/>
           </p14:sldIdLst>
         </p14:section>
-        <p14:section name="개념" id="{12fa3c4e-4a67-e5ac-92e8-b92b309e2cc3}">
+        <p14:section name="개념" id="{da073235-a312-d940-86d0-e043d2d972ed}">
           <p14:sldIdLst>
             <p14:sldId id="258"/>
             <p14:sldId id="259"/>
             <p14:sldId id="260"/>
           </p14:sldIdLst>
         </p14:section>
-        <p14:section name="연습" id="{1d8d35b5-8c35-5755-1c72-937fd46e832a}">
+        <p14:section name="연습" id="{6c0fa612-a9e5-305f-28df-9f2d263f09cb}">
           <p14:sldIdLst>
             <p14:sldId id="261"/>
             <p14:sldId id="262"/>
@@ -142,18 +142,18 @@
             <p14:sldId id="265"/>
           </p14:sldIdLst>
         </p14:section>
-        <p14:section name="확인" id="{bcbeb219-67c3-7006-358e-d63825f2a23c}">
+        <p14:section name="확인" id="{5f69ae18-0507-1d1d-7b34-0b39c8b388a6}">
           <p14:sldIdLst>
             <p14:sldId id="266"/>
             <p14:sldId id="267"/>
           </p14:sldIdLst>
         </p14:section>
-        <p14:section name="정리" id="{69be5b88-635a-98bd-2468-03e15324da83}">
+        <p14:section name="정리" id="{48f61af7-6d2f-c5b5-bcae-eaabbbdbc485}">
           <p14:sldIdLst>
             <p14:sldId id="268"/>
           </p14:sldIdLst>
         </p14:section>
-        <p14:section name="보충" id="{d9ce6eef-f942-221a-b077-01178b202927}">
+        <p14:section name="보충" id="{b20c15b0-1727-49fc-f6dc-28b2bd0eee36}">
           <p14:sldIdLst>
             <p14:sldId id="269"/>
           </p14:sldIdLst>

--- a/dist/초3/영어/듣기와말하기/초3_영어_듣기와말하기_03_감사·사과·부탁_학생용.pptx
+++ b/dist/초3/영어/듣기와말하기/초3_영어_듣기와말하기_03_감사·사과·부탁_학생용.pptx
@@ -120,20 +120,20 @@
   <p:extLst>
     <p:ext uri="{521415D9-36F7-43E2-AB2F-B90AF26B5E84}">
       <p14:sectionLst xmlns:p14="http://schemas.microsoft.com/office/powerpoint/2010/main">
-        <p14:section name="도입" id="{2f1c24aa-c786-7d9e-5398-df5675c2a498}">
+        <p14:section name="도입" id="{1e1ef04f-5f8e-ddce-76c5-ca79e2b7dec1}">
           <p14:sldIdLst>
             <p14:sldId id="256"/>
             <p14:sldId id="257"/>
           </p14:sldIdLst>
         </p14:section>
-        <p14:section name="개념" id="{da073235-a312-d940-86d0-e043d2d972ed}">
+        <p14:section name="개념" id="{18afd2bd-363a-78b6-32e7-95b8ae498100}">
           <p14:sldIdLst>
             <p14:sldId id="258"/>
             <p14:sldId id="259"/>
             <p14:sldId id="260"/>
           </p14:sldIdLst>
         </p14:section>
-        <p14:section name="연습" id="{6c0fa612-a9e5-305f-28df-9f2d263f09cb}">
+        <p14:section name="연습" id="{4bf5b469-e64f-958f-f2ec-e437c5955d98}">
           <p14:sldIdLst>
             <p14:sldId id="261"/>
             <p14:sldId id="262"/>
@@ -142,18 +142,18 @@
             <p14:sldId id="265"/>
           </p14:sldIdLst>
         </p14:section>
-        <p14:section name="확인" id="{5f69ae18-0507-1d1d-7b34-0b39c8b388a6}">
+        <p14:section name="확인" id="{30ee073b-fef5-93a6-0c15-f90b9f6aa84e}">
           <p14:sldIdLst>
             <p14:sldId id="266"/>
             <p14:sldId id="267"/>
           </p14:sldIdLst>
         </p14:section>
-        <p14:section name="정리" id="{48f61af7-6d2f-c5b5-bcae-eaabbbdbc485}">
+        <p14:section name="정리" id="{b0b71b73-3812-81b0-3121-218f65d3d6e4}">
           <p14:sldIdLst>
             <p14:sldId id="268"/>
           </p14:sldIdLst>
         </p14:section>
-        <p14:section name="보충" id="{b20c15b0-1727-49fc-f6dc-28b2bd0eee36}">
+        <p14:section name="보충" id="{13dcf811-563e-f5ab-d7a9-dbf0e5f226ca}">
           <p14:sldIdLst>
             <p14:sldId id="269"/>
           </p14:sldIdLst>
